--- a/public/fun/cards/care/care-18.pptx
+++ b/public/fun/cards/care/care-18.pptx
@@ -3085,7 +3085,7 @@
     <p:bg>
       <p:bgPr>
         <a:solidFill>
-          <a:srgbClr val="FBF8F2"/>
+          <a:srgbClr val="E6F8F0"/>
         </a:solidFill>
         <a:effectLst/>
       </p:bgPr>
@@ -3099,43 +3099,14 @@
       <p:grpSpPr/>
       <p:sp>
         <p:nvSpPr>
-          <p:cNvPr id="2" name="Rectangle 1"/>
-          <p:cNvSpPr/>
+          <p:cNvPr id="2" name="텍스트"/>
+          <p:cNvSpPr txBox="1"/>
           <p:nvPr/>
         </p:nvSpPr>
         <p:spPr>
           <a:xfrm>
-            <a:off x="1944000" y="216000"/>
-            <a:ext cx="10800" cy="1368000"/>
-          </a:xfrm>
-          <a:prstGeom prst="rect">
-            <a:avLst/>
-          </a:prstGeom>
-          <a:solidFill>
-            <a:srgbClr val="91423B"/>
-          </a:solidFill>
-          <a:ln>
-            <a:noFill/>
-          </a:ln>
-        </p:spPr>
-        <p:txBody>
-          <a:bodyPr rtlCol="0" anchor="ctr"/>
-          <a:lstStyle/>
-          <a:p>
-            <a:pPr algn="ctr"/>
-          </a:p>
-        </p:txBody>
-      </p:sp>
-      <p:sp>
-        <p:nvSpPr>
-          <p:cNvPr id="3" name="텍스트"/>
-          <p:cNvSpPr txBox="1"/>
-          <p:nvPr/>
-        </p:nvSpPr>
-        <p:spPr>
-          <a:xfrm>
-            <a:off x="216000" y="201600"/>
-            <a:ext cx="1584000" cy="100800"/>
+            <a:off x="252000" y="223200"/>
+            <a:ext cx="2016000" cy="133351"/>
           </a:xfrm>
           <a:prstGeom prst="rect">
             <a:avLst/>
@@ -3154,9 +3125,9 @@
               </a:lnSpc>
             </a:pPr>
             <a:r>
-              <a:rPr sz="700" b="1" spc="300">
+              <a:rPr sz="700" b="1" spc="200">
                 <a:solidFill>
-                  <a:srgbClr val="66707B"/>
+                  <a:srgbClr val="0B533A"/>
                 </a:solidFill>
                 <a:latin typeface="맑은 고딕"/>
                 <a:ea typeface="맑은 고딕"/>
@@ -3168,119 +3139,14 @@
       </p:sp>
       <p:sp>
         <p:nvSpPr>
-          <p:cNvPr id="4" name="Oval 3"/>
-          <p:cNvSpPr/>
+          <p:cNvPr id="3" name="텍스트"/>
+          <p:cNvSpPr txBox="1"/>
           <p:nvPr/>
         </p:nvSpPr>
         <p:spPr>
           <a:xfrm>
-            <a:off x="315216" y="471096"/>
-            <a:ext cx="90288" cy="90288"/>
-          </a:xfrm>
-          <a:prstGeom prst="ellipse">
-            <a:avLst/>
-          </a:prstGeom>
-          <a:solidFill>
-            <a:srgbClr val="91423B"/>
-          </a:solidFill>
-          <a:ln>
-            <a:noFill/>
-          </a:ln>
-        </p:spPr>
-        <p:txBody>
-          <a:bodyPr rtlCol="0" anchor="ctr"/>
-          <a:lstStyle/>
-          <a:p>
-            <a:pPr algn="ctr"/>
-          </a:p>
-        </p:txBody>
-      </p:sp>
-      <p:sp>
-        <p:nvSpPr>
-          <p:cNvPr id="5" name="Oval 4"/>
-          <p:cNvSpPr/>
-          <p:nvPr/>
-        </p:nvSpPr>
-        <p:spPr>
-          <a:xfrm>
-            <a:off x="386496" y="471096"/>
-            <a:ext cx="90288" cy="90288"/>
-          </a:xfrm>
-          <a:prstGeom prst="ellipse">
-            <a:avLst/>
-          </a:prstGeom>
-          <a:solidFill>
-            <a:srgbClr val="91423B"/>
-          </a:solidFill>
-          <a:ln>
-            <a:noFill/>
-          </a:ln>
-        </p:spPr>
-        <p:txBody>
-          <a:bodyPr rtlCol="0" anchor="ctr"/>
-          <a:lstStyle/>
-          <a:p>
-            <a:pPr algn="ctr"/>
-          </a:p>
-        </p:txBody>
-      </p:sp>
-      <p:sp>
-        <p:nvSpPr>
-          <p:cNvPr id="6" name="Freeform 5"/>
-          <p:cNvSpPr/>
-          <p:nvPr/>
-        </p:nvSpPr>
-        <p:spPr>
-          <a:xfrm>
-            <a:off x="317592" y="535248"/>
-            <a:ext cx="156816" cy="99792"/>
-          </a:xfrm>
-          <a:custGeom>
-            <a:avLst/>
-            <a:gdLst/>
-            <a:ahLst/>
-            <a:cxnLst/>
-            <a:rect l="l" t="t" r="r" b="b"/>
-            <a:pathLst>
-              <a:path w="156816" h="99792">
-                <a:moveTo>
-                  <a:pt x="0" y="0"/>
-                </a:moveTo>
-                <a:lnTo>
-                  <a:pt x="156816" y="0"/>
-                </a:lnTo>
-                <a:lnTo>
-                  <a:pt x="78408" y="99792"/>
-                </a:lnTo>
-                <a:close/>
-              </a:path>
-            </a:pathLst>
-          </a:custGeom>
-          <a:solidFill>
-            <a:srgbClr val="91423B"/>
-          </a:solidFill>
-          <a:ln>
-            <a:noFill/>
-          </a:ln>
-        </p:spPr>
-        <p:txBody>
-          <a:bodyPr rtlCol="0" anchor="ctr"/>
-          <a:lstStyle/>
-          <a:p>
-            <a:pPr algn="ctr"/>
-          </a:p>
-        </p:txBody>
-      </p:sp>
-      <p:sp>
-        <p:nvSpPr>
-          <p:cNvPr id="7" name="텍스트"/>
-          <p:cNvSpPr txBox="1"/>
-          <p:nvPr/>
-        </p:nvSpPr>
-        <p:spPr>
-          <a:xfrm>
-            <a:off x="216000" y="972000"/>
-            <a:ext cx="1728000" cy="122400"/>
+            <a:off x="252000" y="468000"/>
+            <a:ext cx="2520000" cy="360000"/>
           </a:xfrm>
           <a:prstGeom prst="rect">
             <a:avLst/>
@@ -3295,32 +3161,32 @@
           <a:p>
             <a:pPr algn="l">
               <a:lnSpc>
-                <a:spcPts val="1232"/>
+                <a:spcPts val="3190"/>
               </a:lnSpc>
             </a:pPr>
             <a:r>
-              <a:rPr sz="850" b="1">
+              <a:rPr sz="2200" b="1">
                 <a:solidFill>
-                  <a:srgbClr val="91423B"/>
+                  <a:srgbClr val="12151C"/>
                 </a:solidFill>
                 <a:latin typeface="맑은 고딕"/>
                 <a:ea typeface="맑은 고딕"/>
               </a:rPr>
-              <a:t>상담실장</a:t>
-            </a:r>
-          </a:p>
-        </p:txBody>
-      </p:sp>
-      <p:sp>
-        <p:nvSpPr>
-          <p:cNvPr id="8" name="텍스트"/>
+              <a:t>송현우</a:t>
+            </a:r>
+          </a:p>
+        </p:txBody>
+      </p:sp>
+      <p:sp>
+        <p:nvSpPr>
+          <p:cNvPr id="4" name="텍스트"/>
           <p:cNvSpPr txBox="1"/>
           <p:nvPr/>
         </p:nvSpPr>
         <p:spPr>
           <a:xfrm>
-            <a:off x="216000" y="1123200"/>
-            <a:ext cx="1728000" cy="346712"/>
+            <a:off x="252000" y="871200"/>
+            <a:ext cx="2520000" cy="171451"/>
           </a:xfrm>
           <a:prstGeom prst="rect">
             <a:avLst/>
@@ -3335,32 +3201,32 @@
           <a:p>
             <a:pPr algn="l">
               <a:lnSpc>
-                <a:spcPts val="3045"/>
+                <a:spcPts val="1305"/>
               </a:lnSpc>
             </a:pPr>
             <a:r>
-              <a:rPr sz="2100" b="1" spc="50">
+              <a:rPr sz="900" b="0">
                 <a:solidFill>
-                  <a:srgbClr val="16263B"/>
+                  <a:srgbClr val="0B533A"/>
                 </a:solidFill>
-                <a:latin typeface="바탕"/>
-                <a:ea typeface="바탕"/>
+                <a:latin typeface="맑은 고딕"/>
+                <a:ea typeface="맑은 고딕"/>
               </a:rPr>
-              <a:t>송현우</a:t>
-            </a:r>
-          </a:p>
-        </p:txBody>
-      </p:sp>
-      <p:sp>
-        <p:nvSpPr>
-          <p:cNvPr id="9" name="텍스트"/>
+              <a:t>상담실장</a:t>
+            </a:r>
+          </a:p>
+        </p:txBody>
+      </p:sp>
+      <p:sp>
+        <p:nvSpPr>
+          <p:cNvPr id="5" name="텍스트"/>
           <p:cNvSpPr txBox="1"/>
           <p:nvPr/>
         </p:nvSpPr>
         <p:spPr>
           <a:xfrm>
-            <a:off x="2073600" y="540000"/>
-            <a:ext cx="122400" cy="168911"/>
+            <a:off x="252000" y="1216800"/>
+            <a:ext cx="2520000" cy="129541"/>
           </a:xfrm>
           <a:prstGeom prst="rect">
             <a:avLst/>
@@ -3375,32 +3241,61 @@
           <a:p>
             <a:pPr algn="l">
               <a:lnSpc>
-                <a:spcPts val="1015"/>
+                <a:spcPts val="986"/>
               </a:lnSpc>
             </a:pPr>
             <a:r>
-              <a:rPr sz="700" b="1">
+              <a:rPr sz="680" b="0">
                 <a:solidFill>
-                  <a:srgbClr val="91423B"/>
+                  <a:srgbClr val="0B533A"/>
                 </a:solidFill>
                 <a:latin typeface="맑은 고딕"/>
                 <a:ea typeface="맑은 고딕"/>
               </a:rPr>
-              <a:t>T</a:t>
-            </a:r>
-          </a:p>
-        </p:txBody>
-      </p:sp>
-      <p:sp>
-        <p:nvSpPr>
-          <p:cNvPr id="10" name="텍스트"/>
+              <a:t>주소를 입력해 주세요</a:t>
+            </a:r>
+          </a:p>
+        </p:txBody>
+      </p:sp>
+      <p:sp>
+        <p:nvSpPr>
+          <p:cNvPr id="6" name="Rectangle 5"/>
+          <p:cNvSpPr/>
+          <p:nvPr/>
+        </p:nvSpPr>
+        <p:spPr>
+          <a:xfrm>
+            <a:off x="0" y="1476000"/>
+            <a:ext cx="3240000" cy="324000"/>
+          </a:xfrm>
+          <a:prstGeom prst="rect">
+            <a:avLst/>
+          </a:prstGeom>
+          <a:solidFill>
+            <a:srgbClr val="00B86B"/>
+          </a:solidFill>
+          <a:ln>
+            <a:noFill/>
+          </a:ln>
+        </p:spPr>
+        <p:txBody>
+          <a:bodyPr rtlCol="0" anchor="ctr"/>
+          <a:lstStyle/>
+          <a:p>
+            <a:pPr algn="ctr"/>
+          </a:p>
+        </p:txBody>
+      </p:sp>
+      <p:sp>
+        <p:nvSpPr>
+          <p:cNvPr id="7" name="텍스트"/>
           <p:cNvSpPr txBox="1"/>
           <p:nvPr/>
         </p:nvSpPr>
         <p:spPr>
           <a:xfrm>
-            <a:off x="2217600" y="540000"/>
-            <a:ext cx="900000" cy="168911"/>
+            <a:off x="252000" y="1569600"/>
+            <a:ext cx="1296000" cy="133351"/>
           </a:xfrm>
           <a:prstGeom prst="rect">
             <a:avLst/>
@@ -3419,9 +3314,9 @@
               </a:lnSpc>
             </a:pPr>
             <a:r>
-              <a:rPr sz="700" b="0">
+              <a:rPr sz="700" b="1">
                 <a:solidFill>
-                  <a:srgbClr val="16263B"/>
+                  <a:srgbClr val="12151C"/>
                 </a:solidFill>
                 <a:latin typeface="맑은 고딕"/>
                 <a:ea typeface="맑은 고딕"/>
@@ -3433,14 +3328,14 @@
       </p:sp>
       <p:sp>
         <p:nvSpPr>
-          <p:cNvPr id="11" name="텍스트"/>
+          <p:cNvPr id="8" name="텍스트"/>
           <p:cNvSpPr txBox="1"/>
           <p:nvPr/>
         </p:nvSpPr>
         <p:spPr>
           <a:xfrm>
-            <a:off x="2073600" y="708911"/>
-            <a:ext cx="122400" cy="168911"/>
+            <a:off x="1656000" y="1569600"/>
+            <a:ext cx="1368000" cy="133351"/>
           </a:xfrm>
           <a:prstGeom prst="rect">
             <a:avLst/>
@@ -3461,132 +3356,12 @@
             <a:r>
               <a:rPr sz="700" b="1">
                 <a:solidFill>
-                  <a:srgbClr val="91423B"/>
-                </a:solidFill>
-                <a:latin typeface="맑은 고딕"/>
-                <a:ea typeface="맑은 고딕"/>
-              </a:rPr>
-              <a:t>E</a:t>
-            </a:r>
-          </a:p>
-        </p:txBody>
-      </p:sp>
-      <p:sp>
-        <p:nvSpPr>
-          <p:cNvPr id="12" name="텍스트"/>
-          <p:cNvSpPr txBox="1"/>
-          <p:nvPr/>
-        </p:nvSpPr>
-        <p:spPr>
-          <a:xfrm>
-            <a:off x="2217600" y="708911"/>
-            <a:ext cx="900000" cy="168911"/>
-          </a:xfrm>
-          <a:prstGeom prst="rect">
-            <a:avLst/>
-          </a:prstGeom>
-          <a:noFill/>
-        </p:spPr>
-        <p:txBody>
-          <a:bodyPr wrap="square" lIns="0" rIns="0" tIns="0" bIns="0" anchor="t">
-            <a:spAutoFit/>
-          </a:bodyPr>
-          <a:lstStyle/>
-          <a:p>
-            <a:pPr algn="l">
-              <a:lnSpc>
-                <a:spcPts val="1015"/>
-              </a:lnSpc>
-            </a:pPr>
-            <a:r>
-              <a:rPr sz="700" b="0">
-                <a:solidFill>
-                  <a:srgbClr val="16263B"/>
+                  <a:srgbClr val="12151C"/>
                 </a:solidFill>
                 <a:latin typeface="맑은 고딕"/>
                 <a:ea typeface="맑은 고딕"/>
               </a:rPr>
               <a:t>name@example.com</a:t>
-            </a:r>
-          </a:p>
-        </p:txBody>
-      </p:sp>
-      <p:sp>
-        <p:nvSpPr>
-          <p:cNvPr id="13" name="텍스트"/>
-          <p:cNvSpPr txBox="1"/>
-          <p:nvPr/>
-        </p:nvSpPr>
-        <p:spPr>
-          <a:xfrm>
-            <a:off x="2073600" y="877822"/>
-            <a:ext cx="122400" cy="168911"/>
-          </a:xfrm>
-          <a:prstGeom prst="rect">
-            <a:avLst/>
-          </a:prstGeom>
-          <a:noFill/>
-        </p:spPr>
-        <p:txBody>
-          <a:bodyPr wrap="square" lIns="0" rIns="0" tIns="0" bIns="0" anchor="t">
-            <a:spAutoFit/>
-          </a:bodyPr>
-          <a:lstStyle/>
-          <a:p>
-            <a:pPr algn="l">
-              <a:lnSpc>
-                <a:spcPts val="1015"/>
-              </a:lnSpc>
-            </a:pPr>
-            <a:r>
-              <a:rPr sz="700" b="1">
-                <a:solidFill>
-                  <a:srgbClr val="91423B"/>
-                </a:solidFill>
-                <a:latin typeface="맑은 고딕"/>
-                <a:ea typeface="맑은 고딕"/>
-              </a:rPr>
-              <a:t>A</a:t>
-            </a:r>
-          </a:p>
-        </p:txBody>
-      </p:sp>
-      <p:sp>
-        <p:nvSpPr>
-          <p:cNvPr id="14" name="텍스트"/>
-          <p:cNvSpPr txBox="1"/>
-          <p:nvPr/>
-        </p:nvSpPr>
-        <p:spPr>
-          <a:xfrm>
-            <a:off x="2217600" y="877822"/>
-            <a:ext cx="900000" cy="168911"/>
-          </a:xfrm>
-          <a:prstGeom prst="rect">
-            <a:avLst/>
-          </a:prstGeom>
-          <a:noFill/>
-        </p:spPr>
-        <p:txBody>
-          <a:bodyPr wrap="square" lIns="0" rIns="0" tIns="0" bIns="0" anchor="t">
-            <a:spAutoFit/>
-          </a:bodyPr>
-          <a:lstStyle/>
-          <a:p>
-            <a:pPr algn="l">
-              <a:lnSpc>
-                <a:spcPts val="1015"/>
-              </a:lnSpc>
-            </a:pPr>
-            <a:r>
-              <a:rPr sz="700" b="0">
-                <a:solidFill>
-                  <a:srgbClr val="16263B"/>
-                </a:solidFill>
-                <a:latin typeface="맑은 고딕"/>
-                <a:ea typeface="맑은 고딕"/>
-              </a:rPr>
-              <a:t>주소를 입력해 주세요</a:t>
             </a:r>
           </a:p>
         </p:txBody>
@@ -3605,7 +3380,7 @@
     <p:bg>
       <p:bgPr>
         <a:solidFill>
-          <a:srgbClr val="FBF8F2"/>
+          <a:srgbClr val="F3F4F6"/>
         </a:solidFill>
         <a:effectLst/>
       </p:bgPr>
@@ -3625,14 +3400,14 @@
         </p:nvSpPr>
         <p:spPr>
           <a:xfrm>
-            <a:off x="1081440" y="440640"/>
-            <a:ext cx="601920" cy="601920"/>
+            <a:off x="1591200" y="511200"/>
+            <a:ext cx="57600" cy="57600"/>
           </a:xfrm>
           <a:prstGeom prst="ellipse">
             <a:avLst/>
           </a:prstGeom>
           <a:solidFill>
-            <a:srgbClr val="91423B"/>
+            <a:srgbClr val="00B86B"/>
           </a:solidFill>
           <a:ln>
             <a:noFill/>
@@ -3648,121 +3423,14 @@
       </p:sp>
       <p:sp>
         <p:nvSpPr>
-          <p:cNvPr id="3" name="Oval 2"/>
-          <p:cNvSpPr/>
+          <p:cNvPr id="3" name="텍스트"/>
+          <p:cNvSpPr txBox="1"/>
           <p:nvPr/>
         </p:nvSpPr>
         <p:spPr>
           <a:xfrm>
-            <a:off x="1556640" y="440640"/>
-            <a:ext cx="601920" cy="601920"/>
-          </a:xfrm>
-          <a:prstGeom prst="ellipse">
-            <a:avLst/>
-          </a:prstGeom>
-          <a:solidFill>
-            <a:srgbClr val="91423B"/>
-          </a:solidFill>
-          <a:ln>
-            <a:noFill/>
-          </a:ln>
-        </p:spPr>
-        <p:txBody>
-          <a:bodyPr rtlCol="0" anchor="ctr"/>
-          <a:lstStyle/>
-          <a:p>
-            <a:pPr algn="ctr"/>
-          </a:p>
-        </p:txBody>
-      </p:sp>
-      <p:sp>
-        <p:nvSpPr>
-          <p:cNvPr id="4" name="Freeform 3"/>
-          <p:cNvSpPr/>
-          <p:nvPr/>
-        </p:nvSpPr>
-        <p:spPr>
-          <a:xfrm>
-            <a:off x="1097280" y="868320"/>
-            <a:ext cx="1045440" cy="665280"/>
-          </a:xfrm>
-          <a:custGeom>
-            <a:avLst/>
-            <a:gdLst/>
-            <a:ahLst/>
-            <a:cxnLst/>
-            <a:rect l="l" t="t" r="r" b="b"/>
-            <a:pathLst>
-              <a:path w="1045440" h="665280">
-                <a:moveTo>
-                  <a:pt x="0" y="0"/>
-                </a:moveTo>
-                <a:lnTo>
-                  <a:pt x="1045440" y="0"/>
-                </a:lnTo>
-                <a:lnTo>
-                  <a:pt x="522720" y="665280"/>
-                </a:lnTo>
-                <a:close/>
-              </a:path>
-            </a:pathLst>
-          </a:custGeom>
-          <a:solidFill>
-            <a:srgbClr val="91423B"/>
-          </a:solidFill>
-          <a:ln>
-            <a:noFill/>
-          </a:ln>
-        </p:spPr>
-        <p:txBody>
-          <a:bodyPr rtlCol="0" anchor="ctr"/>
-          <a:lstStyle/>
-          <a:p>
-            <a:pPr algn="ctr"/>
-          </a:p>
-        </p:txBody>
-      </p:sp>
-      <p:sp>
-        <p:nvSpPr>
-          <p:cNvPr id="5" name="Rectangle 4"/>
-          <p:cNvSpPr/>
-          <p:nvPr/>
-        </p:nvSpPr>
-        <p:spPr>
-          <a:xfrm>
-            <a:off x="0" y="0"/>
-            <a:ext cx="3240000" cy="1800000"/>
-          </a:xfrm>
-          <a:prstGeom prst="rect">
-            <a:avLst/>
-          </a:prstGeom>
-          <a:solidFill>
-            <a:srgbClr val="FBF8F2">
-              <a:alpha val="90000"/>
-            </a:srgbClr>
-          </a:solidFill>
-          <a:ln>
-            <a:noFill/>
-          </a:ln>
-        </p:spPr>
-        <p:txBody>
-          <a:bodyPr rtlCol="0" anchor="ctr"/>
-          <a:lstStyle/>
-          <a:p>
-            <a:pPr algn="ctr"/>
-          </a:p>
-        </p:txBody>
-      </p:sp>
-      <p:sp>
-        <p:nvSpPr>
-          <p:cNvPr id="6" name="텍스트"/>
-          <p:cNvSpPr txBox="1"/>
-          <p:nvPr/>
-        </p:nvSpPr>
-        <p:spPr>
-          <a:xfrm>
-            <a:off x="396000" y="612000"/>
-            <a:ext cx="2448000" cy="432000"/>
+            <a:off x="396000" y="684000"/>
+            <a:ext cx="2448000" cy="504000"/>
           </a:xfrm>
           <a:prstGeom prst="rect">
             <a:avLst/>
@@ -3770,7 +3438,7 @@
           <a:noFill/>
         </p:spPr>
         <p:txBody>
-          <a:bodyPr wrap="square" lIns="0" rIns="0" tIns="0" bIns="0" anchor="ctr">
+          <a:bodyPr wrap="square" lIns="0" rIns="0" tIns="0" bIns="0" anchor="t">
             <a:spAutoFit/>
           </a:bodyPr>
           <a:lstStyle/>
@@ -3783,10 +3451,10 @@
             <a:r>
               <a:rPr sz="1200" b="1">
                 <a:solidFill>
-                  <a:srgbClr val="16263B"/>
+                  <a:srgbClr val="12151C"/>
                 </a:solidFill>
-                <a:latin typeface="바탕"/>
-                <a:ea typeface="바탕"/>
+                <a:latin typeface="맑은 고딕"/>
+                <a:ea typeface="맑은 고딕"/>
               </a:rPr>
               <a:t>건강한 웃음을 되찾도록 돕겠습니다</a:t>
             </a:r>
@@ -3795,43 +3463,14 @@
       </p:sp>
       <p:sp>
         <p:nvSpPr>
-          <p:cNvPr id="7" name="Rectangle 6"/>
-          <p:cNvSpPr/>
+          <p:cNvPr id="4" name="텍스트"/>
+          <p:cNvSpPr txBox="1"/>
           <p:nvPr/>
         </p:nvSpPr>
         <p:spPr>
           <a:xfrm>
-            <a:off x="1512000" y="1173600"/>
-            <a:ext cx="216000" cy="10800"/>
-          </a:xfrm>
-          <a:prstGeom prst="rect">
-            <a:avLst/>
-          </a:prstGeom>
-          <a:solidFill>
-            <a:srgbClr val="91423B"/>
-          </a:solidFill>
-          <a:ln>
-            <a:noFill/>
-          </a:ln>
-        </p:spPr>
-        <p:txBody>
-          <a:bodyPr rtlCol="0" anchor="ctr"/>
-          <a:lstStyle/>
-          <a:p>
-            <a:pPr algn="ctr"/>
-          </a:p>
-        </p:txBody>
-      </p:sp>
-      <p:sp>
-        <p:nvSpPr>
-          <p:cNvPr id="8" name="텍스트"/>
-          <p:cNvSpPr txBox="1"/>
-          <p:nvPr/>
-        </p:nvSpPr>
-        <p:spPr>
-          <a:xfrm>
-            <a:off x="360000" y="1288800"/>
-            <a:ext cx="2520000" cy="108000"/>
+            <a:off x="360000" y="1339200"/>
+            <a:ext cx="2520000" cy="123826"/>
           </a:xfrm>
           <a:prstGeom prst="rect">
             <a:avLst/>
@@ -3846,13 +3485,13 @@
           <a:p>
             <a:pPr algn="ctr">
               <a:lnSpc>
-                <a:spcPts val="1087"/>
+                <a:spcPts val="942"/>
               </a:lnSpc>
             </a:pPr>
             <a:r>
-              <a:rPr sz="750" b="1" spc="300">
+              <a:rPr sz="650" b="1" spc="300">
                 <a:solidFill>
-                  <a:srgbClr val="66707B"/>
+                  <a:srgbClr val="6B7280"/>
                 </a:solidFill>
                 <a:latin typeface="맑은 고딕"/>
                 <a:ea typeface="맑은 고딕"/>

--- a/public/fun/cards/care/care-18.pptx
+++ b/public/fun/cards/care/care-18.pptx
@@ -3105,8 +3105,8 @@
         </p:nvSpPr>
         <p:spPr>
           <a:xfrm>
-            <a:off x="252000" y="223200"/>
-            <a:ext cx="2016000" cy="133351"/>
+            <a:off x="252000" y="252000"/>
+            <a:ext cx="1512000" cy="123826"/>
           </a:xfrm>
           <a:prstGeom prst="rect">
             <a:avLst/>
@@ -3121,11 +3121,11 @@
           <a:p>
             <a:pPr algn="l">
               <a:lnSpc>
-                <a:spcPts val="1015"/>
+                <a:spcPts val="942"/>
               </a:lnSpc>
             </a:pPr>
             <a:r>
-              <a:rPr sz="700" b="1" spc="200">
+              <a:rPr sz="650" b="1" spc="220">
                 <a:solidFill>
                   <a:srgbClr val="0B533A"/>
                 </a:solidFill>
@@ -3137,16 +3137,37 @@
           </a:p>
         </p:txBody>
       </p:sp>
-      <p:sp>
-        <p:nvSpPr>
-          <p:cNvPr id="3" name="텍스트"/>
+      <p:cxnSp>
+        <p:nvCxnSpPr>
+          <p:cNvPr id="3" name="Connector 2"/>
+          <p:cNvCxnSpPr/>
+          <p:nvPr/>
+        </p:nvCxnSpPr>
+        <p:spPr>
+          <a:xfrm>
+            <a:off x="252000" y="388800"/>
+            <a:ext cx="2736000" cy="0"/>
+          </a:xfrm>
+          <a:prstGeom prst="line">
+            <a:avLst/>
+          </a:prstGeom>
+          <a:ln w="3600">
+            <a:solidFill>
+              <a:srgbClr val="B8EBD6"/>
+            </a:solidFill>
+          </a:ln>
+        </p:spPr>
+      </p:cxnSp>
+      <p:sp>
+        <p:nvSpPr>
+          <p:cNvPr id="4" name="텍스트"/>
           <p:cNvSpPr txBox="1"/>
           <p:nvPr/>
         </p:nvSpPr>
         <p:spPr>
           <a:xfrm>
-            <a:off x="252000" y="468000"/>
-            <a:ext cx="2520000" cy="360000"/>
+            <a:off x="252000" y="576000"/>
+            <a:ext cx="1800000" cy="237600"/>
           </a:xfrm>
           <a:prstGeom prst="rect">
             <a:avLst/>
@@ -3161,11 +3182,11 @@
           <a:p>
             <a:pPr algn="l">
               <a:lnSpc>
-                <a:spcPts val="3190"/>
+                <a:spcPts val="1957"/>
               </a:lnSpc>
             </a:pPr>
             <a:r>
-              <a:rPr sz="2200" b="1">
+              <a:rPr sz="1350" b="1" spc="120">
                 <a:solidFill>
                   <a:srgbClr val="12151C"/>
                 </a:solidFill>
@@ -3179,14 +3200,14 @@
       </p:sp>
       <p:sp>
         <p:nvSpPr>
-          <p:cNvPr id="4" name="텍스트"/>
+          <p:cNvPr id="5" name="텍스트"/>
           <p:cNvSpPr txBox="1"/>
           <p:nvPr/>
         </p:nvSpPr>
         <p:spPr>
           <a:xfrm>
-            <a:off x="252000" y="871200"/>
-            <a:ext cx="2520000" cy="171451"/>
+            <a:off x="252000" y="828000"/>
+            <a:ext cx="1800000" cy="133351"/>
           </a:xfrm>
           <a:prstGeom prst="rect">
             <a:avLst/>
@@ -3201,11 +3222,11 @@
           <a:p>
             <a:pPr algn="l">
               <a:lnSpc>
-                <a:spcPts val="1305"/>
+                <a:spcPts val="1015"/>
               </a:lnSpc>
             </a:pPr>
             <a:r>
-              <a:rPr sz="900" b="0">
+              <a:rPr sz="700" b="0" spc="60">
                 <a:solidFill>
                   <a:srgbClr val="0B533A"/>
                 </a:solidFill>
@@ -3219,14 +3240,14 @@
       </p:sp>
       <p:sp>
         <p:nvSpPr>
-          <p:cNvPr id="5" name="텍스트"/>
+          <p:cNvPr id="6" name="텍스트"/>
           <p:cNvSpPr txBox="1"/>
           <p:nvPr/>
         </p:nvSpPr>
         <p:spPr>
           <a:xfrm>
-            <a:off x="252000" y="1216800"/>
-            <a:ext cx="2520000" cy="129541"/>
+            <a:off x="252000" y="1036800"/>
+            <a:ext cx="2520000" cy="123826"/>
           </a:xfrm>
           <a:prstGeom prst="rect">
             <a:avLst/>
@@ -3241,11 +3262,11 @@
           <a:p>
             <a:pPr algn="l">
               <a:lnSpc>
-                <a:spcPts val="986"/>
+                <a:spcPts val="942"/>
               </a:lnSpc>
             </a:pPr>
             <a:r>
-              <a:rPr sz="680" b="0">
+              <a:rPr sz="650" b="0">
                 <a:solidFill>
                   <a:srgbClr val="0B533A"/>
                 </a:solidFill>
@@ -3259,14 +3280,14 @@
       </p:sp>
       <p:sp>
         <p:nvSpPr>
-          <p:cNvPr id="6" name="Rectangle 5"/>
+          <p:cNvPr id="7" name="Rectangle 6"/>
           <p:cNvSpPr/>
           <p:nvPr/>
         </p:nvSpPr>
         <p:spPr>
           <a:xfrm>
-            <a:off x="0" y="1476000"/>
-            <a:ext cx="3240000" cy="324000"/>
+            <a:off x="0" y="1339200"/>
+            <a:ext cx="3240000" cy="460800"/>
           </a:xfrm>
           <a:prstGeom prst="rect">
             <a:avLst/>
@@ -3288,14 +3309,14 @@
       </p:sp>
       <p:sp>
         <p:nvSpPr>
-          <p:cNvPr id="7" name="텍스트"/>
+          <p:cNvPr id="8" name="텍스트"/>
           <p:cNvSpPr txBox="1"/>
           <p:nvPr/>
         </p:nvSpPr>
         <p:spPr>
           <a:xfrm>
-            <a:off x="252000" y="1569600"/>
-            <a:ext cx="1296000" cy="133351"/>
+            <a:off x="252000" y="1476000"/>
+            <a:ext cx="936000" cy="91441"/>
           </a:xfrm>
           <a:prstGeom prst="rect">
             <a:avLst/>
@@ -3310,11 +3331,53 @@
           <a:p>
             <a:pPr algn="l">
               <a:lnSpc>
-                <a:spcPts val="1015"/>
+                <a:spcPts val="696"/>
               </a:lnSpc>
             </a:pPr>
             <a:r>
-              <a:rPr sz="700" b="1">
+              <a:rPr sz="480" b="1" spc="140">
+                <a:solidFill>
+                  <a:srgbClr val="12151C">
+                    <a:alpha val="70000"/>
+                  </a:srgbClr>
+                </a:solidFill>
+                <a:latin typeface="맑은 고딕"/>
+                <a:ea typeface="맑은 고딕"/>
+              </a:rPr>
+              <a:t>TEL</a:t>
+            </a:r>
+          </a:p>
+        </p:txBody>
+      </p:sp>
+      <p:sp>
+        <p:nvSpPr>
+          <p:cNvPr id="9" name="텍스트"/>
+          <p:cNvSpPr txBox="1"/>
+          <p:nvPr/>
+        </p:nvSpPr>
+        <p:spPr>
+          <a:xfrm>
+            <a:off x="252000" y="1576800"/>
+            <a:ext cx="936000" cy="123826"/>
+          </a:xfrm>
+          <a:prstGeom prst="rect">
+            <a:avLst/>
+          </a:prstGeom>
+          <a:noFill/>
+        </p:spPr>
+        <p:txBody>
+          <a:bodyPr wrap="square" lIns="0" rIns="0" tIns="0" bIns="0" anchor="t">
+            <a:spAutoFit/>
+          </a:bodyPr>
+          <a:lstStyle/>
+          <a:p>
+            <a:pPr algn="l">
+              <a:lnSpc>
+                <a:spcPts val="942"/>
+              </a:lnSpc>
+            </a:pPr>
+            <a:r>
+              <a:rPr sz="650" b="1">
                 <a:solidFill>
                   <a:srgbClr val="12151C"/>
                 </a:solidFill>
@@ -3328,14 +3391,14 @@
       </p:sp>
       <p:sp>
         <p:nvSpPr>
-          <p:cNvPr id="8" name="텍스트"/>
+          <p:cNvPr id="10" name="텍스트"/>
           <p:cNvSpPr txBox="1"/>
           <p:nvPr/>
         </p:nvSpPr>
         <p:spPr>
           <a:xfrm>
-            <a:off x="1656000" y="1569600"/>
-            <a:ext cx="1368000" cy="133351"/>
+            <a:off x="1188000" y="1476000"/>
+            <a:ext cx="1080000" cy="91441"/>
           </a:xfrm>
           <a:prstGeom prst="rect">
             <a:avLst/>
@@ -3350,11 +3413,53 @@
           <a:p>
             <a:pPr algn="l">
               <a:lnSpc>
-                <a:spcPts val="1015"/>
+                <a:spcPts val="696"/>
               </a:lnSpc>
             </a:pPr>
             <a:r>
-              <a:rPr sz="700" b="1">
+              <a:rPr sz="480" b="1" spc="140">
+                <a:solidFill>
+                  <a:srgbClr val="12151C">
+                    <a:alpha val="70000"/>
+                  </a:srgbClr>
+                </a:solidFill>
+                <a:latin typeface="맑은 고딕"/>
+                <a:ea typeface="맑은 고딕"/>
+              </a:rPr>
+              <a:t>MAIL</a:t>
+            </a:r>
+          </a:p>
+        </p:txBody>
+      </p:sp>
+      <p:sp>
+        <p:nvSpPr>
+          <p:cNvPr id="11" name="텍스트"/>
+          <p:cNvSpPr txBox="1"/>
+          <p:nvPr/>
+        </p:nvSpPr>
+        <p:spPr>
+          <a:xfrm>
+            <a:off x="1188000" y="1576800"/>
+            <a:ext cx="1080000" cy="123826"/>
+          </a:xfrm>
+          <a:prstGeom prst="rect">
+            <a:avLst/>
+          </a:prstGeom>
+          <a:noFill/>
+        </p:spPr>
+        <p:txBody>
+          <a:bodyPr wrap="square" lIns="0" rIns="0" tIns="0" bIns="0" anchor="t">
+            <a:spAutoFit/>
+          </a:bodyPr>
+          <a:lstStyle/>
+          <a:p>
+            <a:pPr algn="l">
+              <a:lnSpc>
+                <a:spcPts val="942"/>
+              </a:lnSpc>
+            </a:pPr>
+            <a:r>
+              <a:rPr sz="650" b="1">
                 <a:solidFill>
                   <a:srgbClr val="12151C"/>
                 </a:solidFill>
@@ -3366,6 +3471,27 @@
           </a:p>
         </p:txBody>
       </p:sp>
+      <p:cxnSp>
+        <p:nvCxnSpPr>
+          <p:cNvPr id="12" name="Connector 11"/>
+          <p:cNvCxnSpPr/>
+          <p:nvPr/>
+        </p:nvCxnSpPr>
+        <p:spPr>
+          <a:xfrm>
+            <a:off x="1108800" y="1468800"/>
+            <a:ext cx="0" cy="208800"/>
+          </a:xfrm>
+          <a:prstGeom prst="line">
+            <a:avLst/>
+          </a:prstGeom>
+          <a:ln w="3600">
+            <a:solidFill>
+              <a:srgbClr val="12151C"/>
+            </a:solidFill>
+          </a:ln>
+        </p:spPr>
+      </p:cxnSp>
     </p:spTree>
   </p:cSld>
   <p:clrMapOvr>
@@ -3392,18 +3518,226 @@
         <p:nvPr/>
       </p:nvGrpSpPr>
       <p:grpSpPr/>
-      <p:sp>
-        <p:nvSpPr>
-          <p:cNvPr id="2" name="Oval 1"/>
+      <p:cxnSp>
+        <p:nvCxnSpPr>
+          <p:cNvPr id="2" name="Connector 1"/>
+          <p:cNvCxnSpPr/>
+          <p:nvPr/>
+        </p:nvCxnSpPr>
+        <p:spPr>
+          <a:xfrm>
+            <a:off x="93600" y="122400"/>
+            <a:ext cx="57600" cy="0"/>
+          </a:xfrm>
+          <a:prstGeom prst="line">
+            <a:avLst/>
+          </a:prstGeom>
+          <a:ln w="3600">
+            <a:solidFill>
+              <a:srgbClr val="DCDFE4"/>
+            </a:solidFill>
+          </a:ln>
+        </p:spPr>
+      </p:cxnSp>
+      <p:cxnSp>
+        <p:nvCxnSpPr>
+          <p:cNvPr id="3" name="Connector 2"/>
+          <p:cNvCxnSpPr/>
+          <p:nvPr/>
+        </p:nvCxnSpPr>
+        <p:spPr>
+          <a:xfrm>
+            <a:off x="122400" y="93600"/>
+            <a:ext cx="0" cy="57600"/>
+          </a:xfrm>
+          <a:prstGeom prst="line">
+            <a:avLst/>
+          </a:prstGeom>
+          <a:ln w="3600">
+            <a:solidFill>
+              <a:srgbClr val="DCDFE4"/>
+            </a:solidFill>
+          </a:ln>
+        </p:spPr>
+      </p:cxnSp>
+      <p:cxnSp>
+        <p:nvCxnSpPr>
+          <p:cNvPr id="4" name="Connector 3"/>
+          <p:cNvCxnSpPr/>
+          <p:nvPr/>
+        </p:nvCxnSpPr>
+        <p:spPr>
+          <a:xfrm>
+            <a:off x="3088800" y="122400"/>
+            <a:ext cx="57600" cy="0"/>
+          </a:xfrm>
+          <a:prstGeom prst="line">
+            <a:avLst/>
+          </a:prstGeom>
+          <a:ln w="3600">
+            <a:solidFill>
+              <a:srgbClr val="DCDFE4"/>
+            </a:solidFill>
+          </a:ln>
+        </p:spPr>
+      </p:cxnSp>
+      <p:cxnSp>
+        <p:nvCxnSpPr>
+          <p:cNvPr id="5" name="Connector 4"/>
+          <p:cNvCxnSpPr/>
+          <p:nvPr/>
+        </p:nvCxnSpPr>
+        <p:spPr>
+          <a:xfrm>
+            <a:off x="3117600" y="93600"/>
+            <a:ext cx="0" cy="57600"/>
+          </a:xfrm>
+          <a:prstGeom prst="line">
+            <a:avLst/>
+          </a:prstGeom>
+          <a:ln w="3600">
+            <a:solidFill>
+              <a:srgbClr val="DCDFE4"/>
+            </a:solidFill>
+          </a:ln>
+        </p:spPr>
+      </p:cxnSp>
+      <p:cxnSp>
+        <p:nvCxnSpPr>
+          <p:cNvPr id="6" name="Connector 5"/>
+          <p:cNvCxnSpPr/>
+          <p:nvPr/>
+        </p:nvCxnSpPr>
+        <p:spPr>
+          <a:xfrm>
+            <a:off x="93600" y="1677600"/>
+            <a:ext cx="57600" cy="0"/>
+          </a:xfrm>
+          <a:prstGeom prst="line">
+            <a:avLst/>
+          </a:prstGeom>
+          <a:ln w="3600">
+            <a:solidFill>
+              <a:srgbClr val="DCDFE4"/>
+            </a:solidFill>
+          </a:ln>
+        </p:spPr>
+      </p:cxnSp>
+      <p:cxnSp>
+        <p:nvCxnSpPr>
+          <p:cNvPr id="7" name="Connector 6"/>
+          <p:cNvCxnSpPr/>
+          <p:nvPr/>
+        </p:nvCxnSpPr>
+        <p:spPr>
+          <a:xfrm>
+            <a:off x="122400" y="1648800"/>
+            <a:ext cx="0" cy="57600"/>
+          </a:xfrm>
+          <a:prstGeom prst="line">
+            <a:avLst/>
+          </a:prstGeom>
+          <a:ln w="3600">
+            <a:solidFill>
+              <a:srgbClr val="DCDFE4"/>
+            </a:solidFill>
+          </a:ln>
+        </p:spPr>
+      </p:cxnSp>
+      <p:cxnSp>
+        <p:nvCxnSpPr>
+          <p:cNvPr id="8" name="Connector 7"/>
+          <p:cNvCxnSpPr/>
+          <p:nvPr/>
+        </p:nvCxnSpPr>
+        <p:spPr>
+          <a:xfrm>
+            <a:off x="3088800" y="1677600"/>
+            <a:ext cx="57600" cy="0"/>
+          </a:xfrm>
+          <a:prstGeom prst="line">
+            <a:avLst/>
+          </a:prstGeom>
+          <a:ln w="3600">
+            <a:solidFill>
+              <a:srgbClr val="DCDFE4"/>
+            </a:solidFill>
+          </a:ln>
+        </p:spPr>
+      </p:cxnSp>
+      <p:cxnSp>
+        <p:nvCxnSpPr>
+          <p:cNvPr id="9" name="Connector 8"/>
+          <p:cNvCxnSpPr/>
+          <p:nvPr/>
+        </p:nvCxnSpPr>
+        <p:spPr>
+          <a:xfrm>
+            <a:off x="3117600" y="1648800"/>
+            <a:ext cx="0" cy="57600"/>
+          </a:xfrm>
+          <a:prstGeom prst="line">
+            <a:avLst/>
+          </a:prstGeom>
+          <a:ln w="3600">
+            <a:solidFill>
+              <a:srgbClr val="DCDFE4"/>
+            </a:solidFill>
+          </a:ln>
+        </p:spPr>
+      </p:cxnSp>
+      <p:sp>
+        <p:nvSpPr>
+          <p:cNvPr id="10" name="텍스트"/>
+          <p:cNvSpPr txBox="1"/>
+          <p:nvPr/>
+        </p:nvSpPr>
+        <p:spPr>
+          <a:xfrm>
+            <a:off x="360000" y="331200"/>
+            <a:ext cx="2520000" cy="99061"/>
+          </a:xfrm>
+          <a:prstGeom prst="rect">
+            <a:avLst/>
+          </a:prstGeom>
+          <a:noFill/>
+        </p:spPr>
+        <p:txBody>
+          <a:bodyPr wrap="square" lIns="0" rIns="0" tIns="0" bIns="0" anchor="t">
+            <a:spAutoFit/>
+          </a:bodyPr>
+          <a:lstStyle/>
+          <a:p>
+            <a:pPr algn="ctr">
+              <a:lnSpc>
+                <a:spcPts val="754"/>
+              </a:lnSpc>
+            </a:pPr>
+            <a:r>
+              <a:rPr sz="520" b="1" spc="240">
+                <a:solidFill>
+                  <a:srgbClr val="6B7280"/>
+                </a:solidFill>
+                <a:latin typeface="맑은 고딕"/>
+                <a:ea typeface="맑은 고딕"/>
+              </a:rPr>
+              <a:t>진료 · 상담</a:t>
+            </a:r>
+          </a:p>
+        </p:txBody>
+      </p:sp>
+      <p:sp>
+        <p:nvSpPr>
+          <p:cNvPr id="11" name="Rectangle 10"/>
           <p:cNvSpPr/>
           <p:nvPr/>
         </p:nvSpPr>
         <p:spPr>
           <a:xfrm>
-            <a:off x="1591200" y="511200"/>
-            <a:ext cx="57600" cy="57600"/>
-          </a:xfrm>
-          <a:prstGeom prst="ellipse">
+            <a:off x="1530000" y="453600"/>
+            <a:ext cx="180000" cy="14400"/>
+          </a:xfrm>
+          <a:prstGeom prst="rect">
             <a:avLst/>
           </a:prstGeom>
           <a:solidFill>
@@ -3423,14 +3757,14 @@
       </p:sp>
       <p:sp>
         <p:nvSpPr>
-          <p:cNvPr id="3" name="텍스트"/>
+          <p:cNvPr id="12" name="텍스트"/>
           <p:cNvSpPr txBox="1"/>
           <p:nvPr/>
         </p:nvSpPr>
         <p:spPr>
           <a:xfrm>
-            <a:off x="396000" y="684000"/>
-            <a:ext cx="2448000" cy="504000"/>
+            <a:off x="360000" y="684000"/>
+            <a:ext cx="840000" cy="216000"/>
           </a:xfrm>
           <a:prstGeom prst="rect">
             <a:avLst/>
@@ -3438,38 +3772,261 @@
           <a:noFill/>
         </p:spPr>
         <p:txBody>
-          <a:bodyPr wrap="square" lIns="0" rIns="0" tIns="0" bIns="0" anchor="t">
+          <a:bodyPr wrap="square" lIns="0" rIns="0" tIns="0" bIns="0" anchor="ctr">
             <a:spAutoFit/>
           </a:bodyPr>
           <a:lstStyle/>
           <a:p>
             <a:pPr algn="ctr">
               <a:lnSpc>
-                <a:spcPts val="1739"/>
+                <a:spcPts val="1015"/>
               </a:lnSpc>
             </a:pPr>
             <a:r>
-              <a:rPr sz="1200" b="1">
+              <a:rPr sz="700" b="1">
                 <a:solidFill>
                   <a:srgbClr val="12151C"/>
                 </a:solidFill>
                 <a:latin typeface="맑은 고딕"/>
                 <a:ea typeface="맑은 고딕"/>
               </a:rPr>
-              <a:t>건강한 웃음을 되찾도록 돕겠습니다</a:t>
-            </a:r>
-          </a:p>
-        </p:txBody>
-      </p:sp>
-      <p:sp>
-        <p:nvSpPr>
-          <p:cNvPr id="4" name="텍스트"/>
+              <a:t>일반 진료</a:t>
+            </a:r>
+          </a:p>
+        </p:txBody>
+      </p:sp>
+      <p:sp>
+        <p:nvSpPr>
+          <p:cNvPr id="13" name="텍스트"/>
           <p:cNvSpPr txBox="1"/>
           <p:nvPr/>
         </p:nvSpPr>
         <p:spPr>
           <a:xfrm>
-            <a:off x="360000" y="1339200"/>
+            <a:off x="1200000" y="684000"/>
+            <a:ext cx="840000" cy="216000"/>
+          </a:xfrm>
+          <a:prstGeom prst="rect">
+            <a:avLst/>
+          </a:prstGeom>
+          <a:noFill/>
+        </p:spPr>
+        <p:txBody>
+          <a:bodyPr wrap="square" lIns="0" rIns="0" tIns="0" bIns="0" anchor="ctr">
+            <a:spAutoFit/>
+          </a:bodyPr>
+          <a:lstStyle/>
+          <a:p>
+            <a:pPr algn="ctr">
+              <a:lnSpc>
+                <a:spcPts val="1015"/>
+              </a:lnSpc>
+            </a:pPr>
+            <a:r>
+              <a:rPr sz="700" b="1">
+                <a:solidFill>
+                  <a:srgbClr val="12151C"/>
+                </a:solidFill>
+                <a:latin typeface="맑은 고딕"/>
+                <a:ea typeface="맑은 고딕"/>
+              </a:rPr>
+              <a:t>재활 치료</a:t>
+            </a:r>
+          </a:p>
+        </p:txBody>
+      </p:sp>
+      <p:cxnSp>
+        <p:nvCxnSpPr>
+          <p:cNvPr id="14" name="Connector 13"/>
+          <p:cNvCxnSpPr/>
+          <p:nvPr/>
+        </p:nvCxnSpPr>
+        <p:spPr>
+          <a:xfrm>
+            <a:off x="1200000" y="676800"/>
+            <a:ext cx="0" cy="230400"/>
+          </a:xfrm>
+          <a:prstGeom prst="line">
+            <a:avLst/>
+          </a:prstGeom>
+          <a:ln w="3600">
+            <a:solidFill>
+              <a:srgbClr val="DCDFE4"/>
+            </a:solidFill>
+          </a:ln>
+        </p:spPr>
+      </p:cxnSp>
+      <p:sp>
+        <p:nvSpPr>
+          <p:cNvPr id="15" name="텍스트"/>
+          <p:cNvSpPr txBox="1"/>
+          <p:nvPr/>
+        </p:nvSpPr>
+        <p:spPr>
+          <a:xfrm>
+            <a:off x="2040000" y="684000"/>
+            <a:ext cx="840000" cy="216000"/>
+          </a:xfrm>
+          <a:prstGeom prst="rect">
+            <a:avLst/>
+          </a:prstGeom>
+          <a:noFill/>
+        </p:spPr>
+        <p:txBody>
+          <a:bodyPr wrap="square" lIns="0" rIns="0" tIns="0" bIns="0" anchor="ctr">
+            <a:spAutoFit/>
+          </a:bodyPr>
+          <a:lstStyle/>
+          <a:p>
+            <a:pPr algn="ctr">
+              <a:lnSpc>
+                <a:spcPts val="1015"/>
+              </a:lnSpc>
+            </a:pPr>
+            <a:r>
+              <a:rPr sz="700" b="1">
+                <a:solidFill>
+                  <a:srgbClr val="12151C"/>
+                </a:solidFill>
+                <a:latin typeface="맑은 고딕"/>
+                <a:ea typeface="맑은 고딕"/>
+              </a:rPr>
+              <a:t>치아 관리</a:t>
+            </a:r>
+          </a:p>
+        </p:txBody>
+      </p:sp>
+      <p:cxnSp>
+        <p:nvCxnSpPr>
+          <p:cNvPr id="16" name="Connector 15"/>
+          <p:cNvCxnSpPr/>
+          <p:nvPr/>
+        </p:nvCxnSpPr>
+        <p:spPr>
+          <a:xfrm>
+            <a:off x="2040000" y="676800"/>
+            <a:ext cx="0" cy="230400"/>
+          </a:xfrm>
+          <a:prstGeom prst="line">
+            <a:avLst/>
+          </a:prstGeom>
+          <a:ln w="3600">
+            <a:solidFill>
+              <a:srgbClr val="DCDFE4"/>
+            </a:solidFill>
+          </a:ln>
+        </p:spPr>
+      </p:cxnSp>
+      <p:cxnSp>
+        <p:nvCxnSpPr>
+          <p:cNvPr id="17" name="Connector 16"/>
+          <p:cNvCxnSpPr/>
+          <p:nvPr/>
+        </p:nvCxnSpPr>
+        <p:spPr>
+          <a:xfrm>
+            <a:off x="360000" y="1159200"/>
+            <a:ext cx="2520000" cy="0"/>
+          </a:xfrm>
+          <a:prstGeom prst="line">
+            <a:avLst/>
+          </a:prstGeom>
+          <a:ln w="3600">
+            <a:solidFill>
+              <a:srgbClr val="DCDFE4"/>
+            </a:solidFill>
+          </a:ln>
+        </p:spPr>
+      </p:cxnSp>
+      <p:sp>
+        <p:nvSpPr>
+          <p:cNvPr id="18" name="텍스트"/>
+          <p:cNvSpPr txBox="1"/>
+          <p:nvPr/>
+        </p:nvSpPr>
+        <p:spPr>
+          <a:xfrm>
+            <a:off x="360000" y="1245600"/>
+            <a:ext cx="1224000" cy="118111"/>
+          </a:xfrm>
+          <a:prstGeom prst="rect">
+            <a:avLst/>
+          </a:prstGeom>
+          <a:noFill/>
+        </p:spPr>
+        <p:txBody>
+          <a:bodyPr wrap="square" lIns="0" rIns="0" tIns="0" bIns="0" anchor="t">
+            <a:spAutoFit/>
+          </a:bodyPr>
+          <a:lstStyle/>
+          <a:p>
+            <a:pPr algn="ctr">
+              <a:lnSpc>
+                <a:spcPts val="899"/>
+              </a:lnSpc>
+            </a:pPr>
+            <a:r>
+              <a:rPr sz="620" b="0">
+                <a:solidFill>
+                  <a:srgbClr val="12151C"/>
+                </a:solidFill>
+                <a:latin typeface="맑은 고딕"/>
+                <a:ea typeface="맑은 고딕"/>
+              </a:rPr>
+              <a:t>월–금 09:30 – 18:30</a:t>
+            </a:r>
+          </a:p>
+        </p:txBody>
+      </p:sp>
+      <p:sp>
+        <p:nvSpPr>
+          <p:cNvPr id="19" name="텍스트"/>
+          <p:cNvSpPr txBox="1"/>
+          <p:nvPr/>
+        </p:nvSpPr>
+        <p:spPr>
+          <a:xfrm>
+            <a:off x="1656000" y="1245600"/>
+            <a:ext cx="1224000" cy="118111"/>
+          </a:xfrm>
+          <a:prstGeom prst="rect">
+            <a:avLst/>
+          </a:prstGeom>
+          <a:noFill/>
+        </p:spPr>
+        <p:txBody>
+          <a:bodyPr wrap="square" lIns="0" rIns="0" tIns="0" bIns="0" anchor="t">
+            <a:spAutoFit/>
+          </a:bodyPr>
+          <a:lstStyle/>
+          <a:p>
+            <a:pPr algn="ctr">
+              <a:lnSpc>
+                <a:spcPts val="899"/>
+              </a:lnSpc>
+            </a:pPr>
+            <a:r>
+              <a:rPr sz="620" b="0">
+                <a:solidFill>
+                  <a:srgbClr val="12151C"/>
+                </a:solidFill>
+                <a:latin typeface="맑은 고딕"/>
+                <a:ea typeface="맑은 고딕"/>
+              </a:rPr>
+              <a:t>KAKAO  @채널아이디</a:t>
+            </a:r>
+          </a:p>
+        </p:txBody>
+      </p:sp>
+      <p:sp>
+        <p:nvSpPr>
+          <p:cNvPr id="20" name="텍스트"/>
+          <p:cNvSpPr txBox="1"/>
+          <p:nvPr/>
+        </p:nvSpPr>
+        <p:spPr>
+          <a:xfrm>
+            <a:off x="360000" y="1526400"/>
             <a:ext cx="2520000" cy="123826"/>
           </a:xfrm>
           <a:prstGeom prst="rect">
@@ -3489,7 +4046,7 @@
               </a:lnSpc>
             </a:pPr>
             <a:r>
-              <a:rPr sz="650" b="1" spc="300">
+              <a:rPr sz="650" b="1" spc="220">
                 <a:solidFill>
                   <a:srgbClr val="6B7280"/>
                 </a:solidFill>
